--- a/PPT - Debug Duo.pptx
+++ b/PPT - Debug Duo.pptx
@@ -217,7 +217,7 @@
           <a:p>
             <a:fld id="{26369CE0-5C57-4E91-B09B-62C7607E6B70}" type="datetimeFigureOut">
               <a:rPr lang="en-IN" smtClean="0"/>
-              <a:t>02-04-2026</a:t>
+              <a:t>03-04-2026</a:t>
             </a:fld>
             <a:endParaRPr lang="en-IN"/>
           </a:p>
@@ -749,7 +749,7 @@
             <a:fld id="{1D8BD707-D9CF-40AE-B4C6-C98DA3205C09}" type="datetimeFigureOut">
               <a:rPr lang="en-US" smtClean="0"/>
               <a:pPr/>
-              <a:t>4/2/2026</a:t>
+              <a:t>4/3/2026</a:t>
             </a:fld>
             <a:endParaRPr lang="en-US"/>
           </a:p>
@@ -914,7 +914,7 @@
             <a:fld id="{1D8BD707-D9CF-40AE-B4C6-C98DA3205C09}" type="datetimeFigureOut">
               <a:rPr lang="en-US" smtClean="0"/>
               <a:pPr/>
-              <a:t>4/2/2026</a:t>
+              <a:t>4/3/2026</a:t>
             </a:fld>
             <a:endParaRPr lang="en-US"/>
           </a:p>
@@ -1089,7 +1089,7 @@
             <a:fld id="{1D8BD707-D9CF-40AE-B4C6-C98DA3205C09}" type="datetimeFigureOut">
               <a:rPr lang="en-US" smtClean="0"/>
               <a:pPr/>
-              <a:t>4/2/2026</a:t>
+              <a:t>4/3/2026</a:t>
             </a:fld>
             <a:endParaRPr lang="en-US"/>
           </a:p>
@@ -1254,7 +1254,7 @@
             <a:fld id="{1D8BD707-D9CF-40AE-B4C6-C98DA3205C09}" type="datetimeFigureOut">
               <a:rPr lang="en-US" smtClean="0"/>
               <a:pPr/>
-              <a:t>4/2/2026</a:t>
+              <a:t>4/3/2026</a:t>
             </a:fld>
             <a:endParaRPr lang="en-US"/>
           </a:p>
@@ -1496,7 +1496,7 @@
             <a:fld id="{1D8BD707-D9CF-40AE-B4C6-C98DA3205C09}" type="datetimeFigureOut">
               <a:rPr lang="en-US" smtClean="0"/>
               <a:pPr/>
-              <a:t>4/2/2026</a:t>
+              <a:t>4/3/2026</a:t>
             </a:fld>
             <a:endParaRPr lang="en-US"/>
           </a:p>
@@ -1778,7 +1778,7 @@
             <a:fld id="{1D8BD707-D9CF-40AE-B4C6-C98DA3205C09}" type="datetimeFigureOut">
               <a:rPr lang="en-US" smtClean="0"/>
               <a:pPr/>
-              <a:t>4/2/2026</a:t>
+              <a:t>4/3/2026</a:t>
             </a:fld>
             <a:endParaRPr lang="en-US"/>
           </a:p>
@@ -2194,7 +2194,7 @@
             <a:fld id="{1D8BD707-D9CF-40AE-B4C6-C98DA3205C09}" type="datetimeFigureOut">
               <a:rPr lang="en-US" smtClean="0"/>
               <a:pPr/>
-              <a:t>4/2/2026</a:t>
+              <a:t>4/3/2026</a:t>
             </a:fld>
             <a:endParaRPr lang="en-US"/>
           </a:p>
@@ -2308,7 +2308,7 @@
             <a:fld id="{1D8BD707-D9CF-40AE-B4C6-C98DA3205C09}" type="datetimeFigureOut">
               <a:rPr lang="en-US" smtClean="0"/>
               <a:pPr/>
-              <a:t>4/2/2026</a:t>
+              <a:t>4/3/2026</a:t>
             </a:fld>
             <a:endParaRPr lang="en-US"/>
           </a:p>
@@ -2400,7 +2400,7 @@
             <a:fld id="{1D8BD707-D9CF-40AE-B4C6-C98DA3205C09}" type="datetimeFigureOut">
               <a:rPr lang="en-US" smtClean="0"/>
               <a:pPr/>
-              <a:t>4/2/2026</a:t>
+              <a:t>4/3/2026</a:t>
             </a:fld>
             <a:endParaRPr lang="en-US"/>
           </a:p>
@@ -2672,7 +2672,7 @@
             <a:fld id="{1D8BD707-D9CF-40AE-B4C6-C98DA3205C09}" type="datetimeFigureOut">
               <a:rPr lang="en-US" smtClean="0"/>
               <a:pPr/>
-              <a:t>4/2/2026</a:t>
+              <a:t>4/3/2026</a:t>
             </a:fld>
             <a:endParaRPr lang="en-US"/>
           </a:p>
@@ -2921,7 +2921,7 @@
             <a:fld id="{1D8BD707-D9CF-40AE-B4C6-C98DA3205C09}" type="datetimeFigureOut">
               <a:rPr lang="en-US" smtClean="0"/>
               <a:pPr/>
-              <a:t>4/2/2026</a:t>
+              <a:t>4/3/2026</a:t>
             </a:fld>
             <a:endParaRPr lang="en-US"/>
           </a:p>
@@ -3129,7 +3129,7 @@
             <a:fld id="{1D8BD707-D9CF-40AE-B4C6-C98DA3205C09}" type="datetimeFigureOut">
               <a:rPr lang="en-US" smtClean="0"/>
               <a:pPr/>
-              <a:t>4/2/2026</a:t>
+              <a:t>4/3/2026</a:t>
             </a:fld>
             <a:endParaRPr lang="en-US"/>
           </a:p>
@@ -4752,7 +4752,7 @@
         <p:spPr>
           <a:xfrm>
             <a:off x="6017228" y="6932171"/>
-            <a:ext cx="12064295" cy="1384995"/>
+            <a:ext cx="12064295" cy="1815882"/>
           </a:xfrm>
           <a:prstGeom prst="rect">
             <a:avLst/>
@@ -4779,7 +4779,7 @@
                   <a:schemeClr val="bg1"/>
                 </a:solidFill>
               </a:rPr>
-              <a:t> proves that by combining accessible mapping tech with gamified user experiences, we can solve the urban biodiversity data shortage one photo at a time.</a:t>
+              <a:t> proves that by combining accessible mapping tech with gamified user experiences, we can solve the urban biodiversity data shortage one photo at a time. Expanding Clerk to include multiple social logins (GitHub, Apple) for frictionless onboarding.</a:t>
             </a:r>
             <a:endParaRPr lang="en-IN" sz="2800" dirty="0">
               <a:solidFill>
@@ -6494,7 +6494,7 @@
         <p:spPr>
           <a:xfrm>
             <a:off x="6750444" y="5018768"/>
-            <a:ext cx="10628921" cy="954107"/>
+            <a:ext cx="10628921" cy="1384995"/>
           </a:xfrm>
           <a:prstGeom prst="rect">
             <a:avLst/>
@@ -6513,7 +6513,7 @@
                   <a:schemeClr val="bg1"/>
                 </a:solidFill>
               </a:rPr>
-              <a:t>A photo-first sighting submission form, an interactive real-time community map, and a gamified "Species Explorer" badge system.</a:t>
+              <a:t>A photo-first sighting submission form, an interactive real-time community map, and a gamified "Species Explorer" badge system, secure user authentication.</a:t>
             </a:r>
             <a:endParaRPr lang="en-IN" sz="2800" dirty="0">
               <a:solidFill>
@@ -7085,7 +7085,15 @@
                   <a:schemeClr val="bg1"/>
                 </a:solidFill>
               </a:rPr>
-              <a:t>Frontend: React.js (User Interface)</a:t>
+              <a:t>Frontend: </a:t>
+            </a:r>
+            <a:r>
+              <a:rPr lang="en-US" sz="2400" dirty="0">
+                <a:solidFill>
+                  <a:schemeClr val="bg1"/>
+                </a:solidFill>
+              </a:rPr>
+              <a:t>React.js &amp; Clerk Auth SDK (Handles User Sign-in &amp; Session Management)</a:t>
             </a:r>
           </a:p>
           <a:p>
@@ -7099,7 +7107,7 @@
                   <a:schemeClr val="bg1"/>
                 </a:solidFill>
               </a:rPr>
-              <a:t>Backend: Node.js / Express.js (Hosted on Railway)</a:t>
+              <a:t>Backend: Node.js / Express.js with Clerk Middleware </a:t>
             </a:r>
           </a:p>
           <a:p>
@@ -7143,7 +7151,7 @@
                   <a:schemeClr val="bg1"/>
                 </a:solidFill>
               </a:rPr>
-              <a:t>APIs: HTML5 Geolocation API, Leaflet.js</a:t>
+              <a:t>APIs: HTML5 Geolocation API, Leaflet.js , Gemini API</a:t>
             </a:r>
           </a:p>
         </p:txBody>
@@ -7210,10 +7218,10 @@
       </p:sp>
       <p:pic>
         <p:nvPicPr>
-          <p:cNvPr id="19" name="Picture 18">
+          <p:cNvPr id="13" name="Picture 12">
             <a:extLst>
               <a:ext uri="{FF2B5EF4-FFF2-40B4-BE49-F238E27FC236}">
-                <a16:creationId xmlns:a16="http://schemas.microsoft.com/office/drawing/2014/main" id="{AEC50351-7F86-B34D-7FA8-B8814A47D1FC}"/>
+                <a16:creationId xmlns:a16="http://schemas.microsoft.com/office/drawing/2014/main" id="{4A9E8791-6FB9-0576-E2DB-3D67ED17F3F8}"/>
               </a:ext>
             </a:extLst>
           </p:cNvPr>
@@ -7230,8 +7238,8 @@
         </p:blipFill>
         <p:spPr>
           <a:xfrm>
-            <a:off x="5119437" y="1930822"/>
-            <a:ext cx="10230136" cy="4764695"/>
+            <a:off x="5257799" y="1851758"/>
+            <a:ext cx="11397343" cy="4756348"/>
           </a:xfrm>
           <a:prstGeom prst="rect">
             <a:avLst/>
@@ -7271,7 +7279,7 @@
         </p:nvSpPr>
         <p:spPr>
           <a:xfrm>
-            <a:off x="0" y="0"/>
+            <a:off x="0" y="16329"/>
             <a:ext cx="18288000" cy="10287000"/>
           </a:xfrm>
           <a:custGeom>
@@ -7431,7 +7439,7 @@
               <a:buChar char="•"/>
             </a:pPr>
             <a:r>
-              <a:rPr lang="en-US" sz="3399" b="1" spc="-271">
+              <a:rPr lang="en-US" sz="3399" b="1" spc="-271" dirty="0">
                 <a:solidFill>
                   <a:srgbClr val="FFFFFF"/>
                 </a:solidFill>
@@ -7698,10 +7706,10 @@
       </p:sp>
       <p:pic>
         <p:nvPicPr>
-          <p:cNvPr id="15" name="Picture 14">
+          <p:cNvPr id="18" name="Picture 17">
             <a:extLst>
               <a:ext uri="{FF2B5EF4-FFF2-40B4-BE49-F238E27FC236}">
-                <a16:creationId xmlns:a16="http://schemas.microsoft.com/office/drawing/2014/main" id="{A38E0C9B-E68D-EE8C-C7D3-506E173EA839}"/>
+                <a16:creationId xmlns:a16="http://schemas.microsoft.com/office/drawing/2014/main" id="{1628FDBF-9E21-98AB-9A02-4AB121D4EF92}"/>
               </a:ext>
             </a:extLst>
           </p:cNvPr>
@@ -7718,22 +7726,12 @@
         </p:blipFill>
         <p:spPr>
           <a:xfrm>
-            <a:off x="8487434" y="2099995"/>
-            <a:ext cx="5796767" cy="7709466"/>
+            <a:off x="9933160" y="1868017"/>
+            <a:ext cx="4829175" cy="8362950"/>
           </a:xfrm>
           <a:prstGeom prst="rect">
             <a:avLst/>
           </a:prstGeom>
-          <a:ln>
-            <a:noFill/>
-          </a:ln>
-          <a:effectLst>
-            <a:outerShdw blurRad="292100" dist="139700" dir="2700000" algn="tl" rotWithShape="0">
-              <a:srgbClr val="333333">
-                <a:alpha val="65000"/>
-              </a:srgbClr>
-            </a:outerShdw>
-          </a:effectLst>
         </p:spPr>
       </p:pic>
     </p:spTree>
@@ -8449,7 +8447,7 @@
         <p:spPr>
           <a:xfrm>
             <a:off x="7662242" y="8248664"/>
-            <a:ext cx="11542030" cy="1569660"/>
+            <a:ext cx="11542030" cy="2308324"/>
           </a:xfrm>
           <a:prstGeom prst="rect">
             <a:avLst/>
@@ -8497,7 +8495,23 @@
                   <a:schemeClr val="bg1"/>
                 </a:solidFill>
               </a:rPr>
-              <a:t>HTML5 Geolocation API: Native browser support to easily capture accurate </a:t>
+              <a:t>Clerk </a:t>
+            </a:r>
+            <a:r>
+              <a:rPr lang="en-US" sz="2400" dirty="0" err="1">
+                <a:solidFill>
+                  <a:schemeClr val="bg1"/>
+                </a:solidFill>
+              </a:rPr>
+              <a:t>Authentication,Gemini</a:t>
+            </a:r>
+            <a:r>
+              <a:rPr lang="en-US" sz="2400" dirty="0">
+                <a:solidFill>
+                  <a:schemeClr val="bg1"/>
+                </a:solidFill>
+              </a:rPr>
+              <a:t> API</a:t>
             </a:r>
           </a:p>
           <a:p>
@@ -8511,8 +8525,25 @@
                   <a:schemeClr val="bg1"/>
                 </a:solidFill>
               </a:rPr>
-              <a:t>coordinates.</a:t>
-            </a:r>
+              <a:t>HTML5 Geolocation API: Native browser support to easily capture accurate </a:t>
+            </a:r>
+          </a:p>
+          <a:p>
+            <a:r>
+              <a:rPr lang="en-US" sz="2400" dirty="0">
+                <a:solidFill>
+                  <a:schemeClr val="bg1"/>
+                </a:solidFill>
+              </a:rPr>
+              <a:t>      coordinates.</a:t>
+            </a:r>
+          </a:p>
+          <a:p>
+            <a:endParaRPr lang="en-US" sz="2400" dirty="0">
+              <a:solidFill>
+                <a:schemeClr val="bg1"/>
+              </a:solidFill>
+            </a:endParaRPr>
           </a:p>
         </p:txBody>
       </p:sp>
@@ -9024,7 +9055,7 @@
                   <a:schemeClr val="bg1"/>
                 </a:solidFill>
               </a:rPr>
-              <a:t>Build photo upload and GPS capture logic. </a:t>
+              <a:t>Build photo upload and GPS capture logic.</a:t>
             </a:r>
           </a:p>
           <a:p>
@@ -9037,7 +9068,7 @@
                   <a:schemeClr val="bg1"/>
                 </a:solidFill>
               </a:rPr>
-              <a:t>Connect to Firebase. </a:t>
+              <a:t>Configure Clerk Auth &amp; Middleware </a:t>
             </a:r>
           </a:p>
           <a:p>
@@ -9119,7 +9150,7 @@
         <p:spPr>
           <a:xfrm>
             <a:off x="6434362" y="6783454"/>
-            <a:ext cx="9228220" cy="1815882"/>
+            <a:ext cx="9228220" cy="2246769"/>
           </a:xfrm>
           <a:prstGeom prst="rect">
             <a:avLst/>
@@ -9153,7 +9184,15 @@
                   <a:schemeClr val="bg1"/>
                 </a:solidFill>
               </a:rPr>
-              <a:t>9:30 AM - 12:30 PM: Core React UI &amp; Map setup.</a:t>
+              <a:t>9:30 AM - 12:30 PM: </a:t>
+            </a:r>
+            <a:r>
+              <a:rPr lang="en-US" sz="2800" dirty="0">
+                <a:solidFill>
+                  <a:schemeClr val="bg1"/>
+                </a:solidFill>
+              </a:rPr>
+              <a:t>Core React UI, Map setup, and Clerk Provider Integration.</a:t>
             </a:r>
           </a:p>
           <a:p>
